--- a/templates/decks/en/kids-ai-explainer/template.pptx
+++ b/templates/decks/en/kids-ai-explainer/template.pptx
@@ -376,7 +376,7 @@
             <a:pPr indent="0" algn="r">
               <a:buNone/>
             </a:pPr>
-            <a:fld id="{9556C40F-0F0E-4CF2-9DF8-542885DB86EB}" type="slidenum">
+            <a:fld id="{14288795-ACD2-4523-9F1E-7C8966B29FDF}" type="slidenum">
               <a:rPr lang="en-US" sz="1400" b="0" u="none" strike="noStrike">
                 <a:solidFill>
                   <a:srgbClr val="000000"/>
@@ -550,7 +550,7 @@
               </a:lnSpc>
               <a:buNone/>
             </a:pPr>
-            <a:fld id="{9EB934BE-8B10-4E9A-AFC5-7E700B6FFA08}" type="slidenum">
+            <a:fld id="{E3BC418D-D817-4B46-A3F1-D3CAA5E3EB53}" type="slidenum">
               <a:rPr lang="en-US" sz="1200" b="0" u="none" strike="noStrike">
                 <a:solidFill>
                   <a:srgbClr val="000000"/>
@@ -723,7 +723,7 @@
               </a:lnSpc>
               <a:buNone/>
             </a:pPr>
-            <a:fld id="{410D2437-5361-40DD-A2D1-FC142125B230}" type="slidenum">
+            <a:fld id="{52E96B83-CC74-4F2D-BC7D-3AFB8372E8DC}" type="slidenum">
               <a:rPr lang="en-US" sz="1200" b="0" u="none" strike="noStrike">
                 <a:solidFill>
                   <a:srgbClr val="000000"/>
@@ -896,7 +896,7 @@
               </a:lnSpc>
               <a:buNone/>
             </a:pPr>
-            <a:fld id="{624E8446-E528-4D59-A1E8-4346DB496903}" type="slidenum">
+            <a:fld id="{CC21EB0D-F65C-400A-AFB5-24E3898D2952}" type="slidenum">
               <a:rPr lang="en-US" sz="1200" b="0" u="none" strike="noStrike">
                 <a:solidFill>
                   <a:srgbClr val="000000"/>
@@ -1069,7 +1069,7 @@
               </a:lnSpc>
               <a:buNone/>
             </a:pPr>
-            <a:fld id="{82DE4CBE-0460-42E8-8602-8FD9C0058A2F}" type="slidenum">
+            <a:fld id="{0D236983-8788-464A-8D3E-8D114B44BAC0}" type="slidenum">
               <a:rPr lang="en-US" sz="1200" b="0" u="none" strike="noStrike">
                 <a:solidFill>
                   <a:srgbClr val="000000"/>
@@ -1242,7 +1242,7 @@
               </a:lnSpc>
               <a:buNone/>
             </a:pPr>
-            <a:fld id="{5B7CE4DD-DF02-461A-B31D-0AF2CD3CC488}" type="slidenum">
+            <a:fld id="{430FCEC6-72A3-4435-91DB-F54D9A218F45}" type="slidenum">
               <a:rPr lang="en-US" sz="1200" b="0" u="none" strike="noStrike">
                 <a:solidFill>
                   <a:srgbClr val="000000"/>
@@ -1415,7 +1415,7 @@
               </a:lnSpc>
               <a:buNone/>
             </a:pPr>
-            <a:fld id="{1632CED8-9897-4F56-A666-D516CD35C7FD}" type="slidenum">
+            <a:fld id="{F22E81EF-2D51-4C83-A991-571305FBAF2E}" type="slidenum">
               <a:rPr lang="en-US" sz="1200" b="0" u="none" strike="noStrike">
                 <a:solidFill>
                   <a:srgbClr val="000000"/>
@@ -1588,7 +1588,7 @@
               </a:lnSpc>
               <a:buNone/>
             </a:pPr>
-            <a:fld id="{245410AA-8E00-49C6-8A5B-05876A940931}" type="slidenum">
+            <a:fld id="{6D46BC05-D313-491E-8211-303ACBD59CF6}" type="slidenum">
               <a:rPr lang="en-US" sz="1200" b="0" u="none" strike="noStrike">
                 <a:solidFill>
                   <a:srgbClr val="000000"/>
@@ -1761,7 +1761,7 @@
               </a:lnSpc>
               <a:buNone/>
             </a:pPr>
-            <a:fld id="{B0A897E4-AC32-493E-A19A-845A29C3D29D}" type="slidenum">
+            <a:fld id="{A2791D28-5F17-486D-B9B0-8DA178FF30EB}" type="slidenum">
               <a:rPr lang="en-US" sz="1200" b="0" u="none" strike="noStrike">
                 <a:solidFill>
                   <a:srgbClr val="000000"/>
@@ -1934,7 +1934,7 @@
               </a:lnSpc>
               <a:buNone/>
             </a:pPr>
-            <a:fld id="{D680C558-4CCC-4169-8465-D4F951016731}" type="slidenum">
+            <a:fld id="{0A21C4BF-0C6D-4CB1-9AE7-862C34DBB794}" type="slidenum">
               <a:rPr lang="en-US" sz="1200" b="0" u="none" strike="noStrike">
                 <a:solidFill>
                   <a:srgbClr val="000000"/>
@@ -2107,7 +2107,7 @@
               </a:lnSpc>
               <a:buNone/>
             </a:pPr>
-            <a:fld id="{B7BFFF17-7364-4DC6-9388-60E4EC386363}" type="slidenum">
+            <a:fld id="{3D0235C5-EA2C-468F-8F1C-DE3DBFBE7FA5}" type="slidenum">
               <a:rPr lang="en-US" sz="1200" b="0" u="none" strike="noStrike">
                 <a:solidFill>
                   <a:srgbClr val="000000"/>
@@ -2280,7 +2280,7 @@
               </a:lnSpc>
               <a:buNone/>
             </a:pPr>
-            <a:fld id="{21D8FF78-64B1-4C29-86F6-5863E22A6270}" type="slidenum">
+            <a:fld id="{335895E0-6DCF-4480-ADA0-9FFE7FC8E364}" type="slidenum">
               <a:rPr lang="en-US" sz="1200" b="0" u="none" strike="noStrike">
                 <a:solidFill>
                   <a:srgbClr val="000000"/>
@@ -2453,7 +2453,7 @@
               </a:lnSpc>
               <a:buNone/>
             </a:pPr>
-            <a:fld id="{6FD11D00-2FB9-46CA-ABE6-A2CB9E91DC01}" type="slidenum">
+            <a:fld id="{EFF24B97-AF28-4BFA-AC1D-E727B9D1DAE3}" type="slidenum">
               <a:rPr lang="en-US" sz="1200" b="0" u="none" strike="noStrike">
                 <a:solidFill>
                   <a:srgbClr val="000000"/>
@@ -2770,7 +2770,7 @@
               </a:lnSpc>
               <a:buNone/>
             </a:pPr>
-            <a:fld id="{65F24B38-237C-43D2-8F11-FF3C845523B0}" type="slidenum">
+            <a:fld id="{552BCA31-5E87-4929-89FE-9192C5E281E3}" type="slidenum">
               <a:rPr lang="en-US" sz="1200" b="0" u="none" strike="noStrike">
                 <a:solidFill>
                   <a:schemeClr val="dk1">
@@ -3479,7 +3479,7 @@
               </a:lnSpc>
               <a:buNone/>
             </a:pPr>
-            <a:fld id="{8A52FB52-9116-4588-94D7-79F749366104}" type="slidenum">
+            <a:fld id="{5D36949A-3E57-46EF-9CBD-18954D11C705}" type="slidenum">
               <a:rPr lang="en-US" sz="1200" b="0" u="none" strike="noStrike">
                 <a:solidFill>
                   <a:schemeClr val="dk1">
@@ -4274,7 +4274,7 @@
               </a:lnSpc>
               <a:buNone/>
             </a:pPr>
-            <a:fld id="{74386E68-F014-423A-AA56-C5B1AD0DF3A6}" type="slidenum">
+            <a:fld id="{DEA99058-72C5-4FB4-95F0-CBCDBE492A61}" type="slidenum">
               <a:rPr lang="en-US" sz="1200" b="0" u="none" strike="noStrike">
                 <a:solidFill>
                   <a:schemeClr val="dk1">
@@ -4899,7 +4899,7 @@
               </a:lnSpc>
               <a:buNone/>
             </a:pPr>
-            <a:fld id="{24CB3848-B269-46CF-A2C3-A64D2E8C0465}" type="slidenum">
+            <a:fld id="{AAA7315D-6C9F-4777-BDD2-A8000B968EE8}" type="slidenum">
               <a:rPr lang="en-US" sz="1200" b="0" u="none" strike="noStrike">
                 <a:solidFill>
                   <a:schemeClr val="dk1">
@@ -5524,7 +5524,7 @@
               </a:lnSpc>
               <a:buNone/>
             </a:pPr>
-            <a:fld id="{92842C36-649C-4B28-8CDC-DD288CBB6B36}" type="slidenum">
+            <a:fld id="{CE029FB2-B0D1-4FE8-B36E-F83EB65A433C}" type="slidenum">
               <a:rPr lang="en-US" sz="1200" b="0" u="none" strike="noStrike">
                 <a:solidFill>
                   <a:schemeClr val="dk1">
@@ -6149,7 +6149,7 @@
               </a:lnSpc>
               <a:buNone/>
             </a:pPr>
-            <a:fld id="{688A5923-FD06-4178-9696-65981DFAF3AD}" type="slidenum">
+            <a:fld id="{726A557F-2360-42A3-9E26-80C676F7EC14}" type="slidenum">
               <a:rPr lang="en-US" sz="1200" b="0" u="none" strike="noStrike">
                 <a:solidFill>
                   <a:schemeClr val="dk1">
@@ -6558,7 +6558,7 @@
               </a:lnSpc>
               <a:buNone/>
             </a:pPr>
-            <a:fld id="{7DB47DB3-2C8A-4E12-92EF-548A742A8DA5}" type="slidenum">
+            <a:fld id="{BEA14EAD-E297-43A4-BA65-C077F3035A79}" type="slidenum">
               <a:rPr lang="en-US" sz="1200" b="0" u="none" strike="noStrike">
                 <a:solidFill>
                   <a:schemeClr val="dk1">
@@ -7489,7 +7489,7 @@
               </a:lnSpc>
               <a:buNone/>
             </a:pPr>
-            <a:fld id="{F999FD5D-754E-4272-A80B-90150B48D878}" type="slidenum">
+            <a:fld id="{44A5192C-F921-4C84-B2F5-E15220D2A4EB}" type="slidenum">
               <a:rPr lang="en-US" sz="1200" b="0" u="none" strike="noStrike">
                 <a:solidFill>
                   <a:schemeClr val="dk1">
@@ -8648,7 +8648,7 @@
               </a:lnSpc>
               <a:buNone/>
             </a:pPr>
-            <a:fld id="{5C30FAEA-8FC2-4147-BBBB-890B339312A0}" type="slidenum">
+            <a:fld id="{B96596C6-F5B9-41B4-A3D6-477C0B131D8E}" type="slidenum">
               <a:rPr lang="en-US" sz="1200" b="0" u="none" strike="noStrike">
                 <a:solidFill>
                   <a:schemeClr val="dk1">
@@ -8967,7 +8967,7 @@
               </a:lnSpc>
               <a:buNone/>
             </a:pPr>
-            <a:fld id="{7074DB71-1059-4A05-A342-ECB5A72B5DDC}" type="slidenum">
+            <a:fld id="{08AABC0C-4DA2-4685-8F6C-596B56ACB6ED}" type="slidenum">
               <a:rPr lang="en-US" sz="1200" b="0" u="none" strike="noStrike">
                 <a:solidFill>
                   <a:schemeClr val="dk1">
@@ -9214,7 +9214,7 @@
               </a:lnSpc>
               <a:buNone/>
             </a:pPr>
-            <a:fld id="{10E52D93-3D0E-4AC6-8ECB-F8FEA12894AF}" type="slidenum">
+            <a:fld id="{E264F871-FEC3-4760-8F45-33C4EB5A4BA7}" type="slidenum">
               <a:rPr lang="en-US" sz="1200" b="0" u="none" strike="noStrike">
                 <a:solidFill>
                   <a:schemeClr val="dk1">
@@ -31871,8 +31871,8 @@
         </p:nvSpPr>
         <p:spPr>
           <a:xfrm>
-            <a:off x="2855160" y="2557440"/>
-            <a:ext cx="50040" cy="252000"/>
+            <a:off x="2858040" y="2622240"/>
+            <a:ext cx="44640" cy="224640"/>
           </a:xfrm>
           <a:prstGeom prst="roundRect">
             <a:avLst>
@@ -31929,8 +31929,8 @@
         </p:nvSpPr>
         <p:spPr>
           <a:xfrm>
-            <a:off x="2804760" y="2464920"/>
-            <a:ext cx="151200" cy="151200"/>
+            <a:off x="2813040" y="2539800"/>
+            <a:ext cx="134640" cy="134640"/>
           </a:xfrm>
           <a:prstGeom prst="ellipse">
             <a:avLst/>
@@ -31985,8 +31985,8 @@
         </p:nvSpPr>
         <p:spPr>
           <a:xfrm>
-            <a:off x="2838240" y="2498400"/>
-            <a:ext cx="83880" cy="83880"/>
+            <a:off x="2842920" y="2569680"/>
+            <a:ext cx="74520" cy="74520"/>
           </a:xfrm>
           <a:prstGeom prst="star4">
             <a:avLst>
@@ -32020,7 +32020,7 @@
           <a:fontRef idx="minor"/>
         </p:style>
         <p:txBody>
-          <a:bodyPr lIns="90000" tIns="-30240" rIns="90000" bIns="-30240" anchor="ctr">
+          <a:bodyPr lIns="90000" tIns="-31680" rIns="90000" bIns="-31680" anchor="ctr">
             <a:noAutofit/>
           </a:bodyPr>
           <a:p>
@@ -32043,8 +32043,8 @@
         </p:nvSpPr>
         <p:spPr>
           <a:xfrm>
-            <a:off x="2400840" y="3062160"/>
-            <a:ext cx="75240" cy="184680"/>
+            <a:off x="2453040" y="3072240"/>
+            <a:ext cx="66960" cy="164520"/>
           </a:xfrm>
           <a:prstGeom prst="roundRect">
             <a:avLst>
@@ -32101,8 +32101,8 @@
         </p:nvSpPr>
         <p:spPr>
           <a:xfrm>
-            <a:off x="3284280" y="3062160"/>
-            <a:ext cx="75240" cy="184680"/>
+            <a:off x="3240360" y="3072240"/>
+            <a:ext cx="66960" cy="164520"/>
           </a:xfrm>
           <a:prstGeom prst="roundRect">
             <a:avLst>
@@ -32159,8 +32159,8 @@
         </p:nvSpPr>
         <p:spPr>
           <a:xfrm>
-            <a:off x="2459880" y="2792880"/>
-            <a:ext cx="840960" cy="723240"/>
+            <a:off x="2505600" y="2832120"/>
+            <a:ext cx="749520" cy="644400"/>
           </a:xfrm>
           <a:prstGeom prst="roundRect">
             <a:avLst>
@@ -32217,8 +32217,8 @@
         </p:nvSpPr>
         <p:spPr>
           <a:xfrm>
-            <a:off x="2560680" y="2947320"/>
-            <a:ext cx="639000" cy="448200"/>
+            <a:off x="2595600" y="2969640"/>
+            <a:ext cx="569520" cy="399600"/>
           </a:xfrm>
           <a:prstGeom prst="roundRect">
             <a:avLst>
@@ -32275,8 +32275,8 @@
         </p:nvSpPr>
         <p:spPr>
           <a:xfrm>
-            <a:off x="2683080" y="3078720"/>
-            <a:ext cx="113040" cy="113040"/>
+            <a:off x="2704320" y="3087000"/>
+            <a:ext cx="100800" cy="100800"/>
           </a:xfrm>
           <a:prstGeom prst="ellipse">
             <a:avLst/>
@@ -32308,7 +32308,7 @@
           <a:fontRef idx="minor"/>
         </p:style>
         <p:txBody>
-          <a:bodyPr lIns="90000" tIns="34920" rIns="90000" bIns="34920" anchor="ctr">
+          <a:bodyPr lIns="90000" tIns="26280" rIns="90000" bIns="26280" anchor="ctr">
             <a:noAutofit/>
           </a:bodyPr>
           <a:p>
@@ -32331,8 +32331,8 @@
         </p:nvSpPr>
         <p:spPr>
           <a:xfrm>
-            <a:off x="2714760" y="3117600"/>
-            <a:ext cx="49680" cy="49680"/>
+            <a:off x="2732760" y="3121560"/>
+            <a:ext cx="44280" cy="44280"/>
           </a:xfrm>
           <a:prstGeom prst="ellipse">
             <a:avLst/>
@@ -32364,7 +32364,7 @@
           <a:fontRef idx="minor"/>
         </p:style>
         <p:txBody>
-          <a:bodyPr lIns="90000" tIns="-9720" rIns="90000" bIns="-9720" anchor="ctr">
+          <a:bodyPr lIns="90000" tIns="-13680" rIns="90000" bIns="-13680" anchor="ctr">
             <a:noAutofit/>
           </a:bodyPr>
           <a:p>
@@ -32387,8 +32387,8 @@
         </p:nvSpPr>
         <p:spPr>
           <a:xfrm>
-            <a:off x="2709000" y="3105000"/>
-            <a:ext cx="24480" cy="24480"/>
+            <a:off x="2727720" y="3110400"/>
+            <a:ext cx="21960" cy="21960"/>
           </a:xfrm>
           <a:prstGeom prst="ellipse">
             <a:avLst/>
@@ -32420,7 +32420,7 @@
           <a:fontRef idx="minor"/>
         </p:style>
         <p:txBody>
-          <a:bodyPr lIns="90000" tIns="-27720" rIns="90000" bIns="-27720" anchor="ctr">
+          <a:bodyPr lIns="90000" tIns="-29520" rIns="90000" bIns="-29520" anchor="ctr">
             <a:noAutofit/>
           </a:bodyPr>
           <a:p>
@@ -32443,8 +32443,8 @@
         </p:nvSpPr>
         <p:spPr>
           <a:xfrm>
-            <a:off x="2964240" y="3078720"/>
-            <a:ext cx="113040" cy="113040"/>
+            <a:off x="2955240" y="3087000"/>
+            <a:ext cx="100800" cy="100800"/>
           </a:xfrm>
           <a:prstGeom prst="ellipse">
             <a:avLst/>
@@ -32476,7 +32476,7 @@
           <a:fontRef idx="minor"/>
         </p:style>
         <p:txBody>
-          <a:bodyPr lIns="90000" tIns="34920" rIns="90000" bIns="34920" anchor="ctr">
+          <a:bodyPr lIns="90000" tIns="26280" rIns="90000" bIns="26280" anchor="ctr">
             <a:noAutofit/>
           </a:bodyPr>
           <a:p>
@@ -32499,8 +32499,8 @@
         </p:nvSpPr>
         <p:spPr>
           <a:xfrm>
-            <a:off x="2995920" y="3117600"/>
-            <a:ext cx="49680" cy="49680"/>
+            <a:off x="2983320" y="3121560"/>
+            <a:ext cx="44280" cy="44280"/>
           </a:xfrm>
           <a:prstGeom prst="ellipse">
             <a:avLst/>
@@ -32532,7 +32532,7 @@
           <a:fontRef idx="minor"/>
         </p:style>
         <p:txBody>
-          <a:bodyPr lIns="90000" tIns="-9720" rIns="90000" bIns="-9720" anchor="ctr">
+          <a:bodyPr lIns="90000" tIns="-13680" rIns="90000" bIns="-13680" anchor="ctr">
             <a:noAutofit/>
           </a:bodyPr>
           <a:p>
@@ -32555,8 +32555,8 @@
         </p:nvSpPr>
         <p:spPr>
           <a:xfrm>
-            <a:off x="2990520" y="3105000"/>
-            <a:ext cx="24480" cy="24480"/>
+            <a:off x="2978280" y="3110400"/>
+            <a:ext cx="21960" cy="21960"/>
           </a:xfrm>
           <a:prstGeom prst="ellipse">
             <a:avLst/>
@@ -32588,7 +32588,7 @@
           <a:fontRef idx="minor"/>
         </p:style>
         <p:txBody>
-          <a:bodyPr lIns="90000" tIns="-27720" rIns="90000" bIns="-27720" anchor="ctr">
+          <a:bodyPr lIns="90000" tIns="-29520" rIns="90000" bIns="-29520" anchor="ctr">
             <a:noAutofit/>
           </a:bodyPr>
           <a:p>
@@ -32611,8 +32611,8 @@
         </p:nvSpPr>
         <p:spPr>
           <a:xfrm>
-            <a:off x="2670840" y="3197160"/>
-            <a:ext cx="92160" cy="92160"/>
+            <a:off x="2693520" y="3192480"/>
+            <a:ext cx="82080" cy="82080"/>
           </a:xfrm>
           <a:prstGeom prst="ellipse">
             <a:avLst/>
@@ -32646,7 +32646,7 @@
           <a:fontRef idx="minor"/>
         </p:style>
         <p:txBody>
-          <a:bodyPr lIns="90000" tIns="20520" rIns="90000" bIns="20520" anchor="ctr">
+          <a:bodyPr lIns="90000" tIns="13320" rIns="90000" bIns="13320" anchor="ctr">
             <a:noAutofit/>
           </a:bodyPr>
           <a:p>
@@ -32669,8 +32669,8 @@
         </p:nvSpPr>
         <p:spPr>
           <a:xfrm>
-            <a:off x="2997360" y="3197160"/>
-            <a:ext cx="92160" cy="92160"/>
+            <a:off x="2984760" y="3192480"/>
+            <a:ext cx="82080" cy="82080"/>
           </a:xfrm>
           <a:prstGeom prst="ellipse">
             <a:avLst/>
@@ -32704,7 +32704,7 @@
           <a:fontRef idx="minor"/>
         </p:style>
         <p:txBody>
-          <a:bodyPr lIns="90000" tIns="20520" rIns="90000" bIns="20520" anchor="ctr">
+          <a:bodyPr lIns="90000" tIns="13320" rIns="90000" bIns="13320" anchor="ctr">
             <a:noAutofit/>
           </a:bodyPr>
           <a:p>
@@ -32727,8 +32727,8 @@
         </p:nvSpPr>
         <p:spPr>
           <a:xfrm>
-            <a:off x="2754000" y="3137760"/>
-            <a:ext cx="252000" cy="252000"/>
+            <a:off x="2768040" y="3139560"/>
+            <a:ext cx="224640" cy="224640"/>
           </a:xfrm>
           <a:prstGeom prst="arc">
             <a:avLst>
@@ -32737,7 +32737,7 @@
             </a:avLst>
           </a:prstGeom>
           <a:noFill/>
-          <a:ln cap="rnd" w="37388">
+          <a:ln cap="rnd" w="33324">
             <a:solidFill>
               <a:srgbClr val="EAF6FF"/>
             </a:solidFill>
@@ -32787,7 +32787,7 @@
         </p:nvSpPr>
         <p:spPr>
           <a:xfrm>
-            <a:off x="2432160" y="1536120"/>
+            <a:off x="2432160" y="1334880"/>
             <a:ext cx="895680" cy="895680"/>
           </a:xfrm>
           <a:prstGeom prst="ellipse">
@@ -32847,7 +32847,7 @@
         </p:blipFill>
         <p:spPr>
           <a:xfrm>
-            <a:off x="2629440" y="1733400"/>
+            <a:off x="2629440" y="1532160"/>
             <a:ext cx="501480" cy="501480"/>
           </a:xfrm>
           <a:prstGeom prst="rect">
@@ -32867,7 +32867,7 @@
         </p:nvSpPr>
         <p:spPr>
           <a:xfrm>
-            <a:off x="2011680" y="2459880"/>
+            <a:off x="2011680" y="2258640"/>
             <a:ext cx="1737000" cy="310680"/>
           </a:xfrm>
           <a:prstGeom prst="rect">

--- a/templates/decks/en/kids-ai-explainer/template.pptx
+++ b/templates/decks/en/kids-ai-explainer/template.pptx
@@ -376,7 +376,7 @@
             <a:pPr indent="0" algn="r">
               <a:buNone/>
             </a:pPr>
-            <a:fld id="{14288795-ACD2-4523-9F1E-7C8966B29FDF}" type="slidenum">
+            <a:fld id="{D1BB111C-DD1F-426D-8C3F-B7B0A5D13C79}" type="slidenum">
               <a:rPr lang="en-US" sz="1400" b="0" u="none" strike="noStrike">
                 <a:solidFill>
                   <a:srgbClr val="000000"/>
@@ -550,7 +550,7 @@
               </a:lnSpc>
               <a:buNone/>
             </a:pPr>
-            <a:fld id="{E3BC418D-D817-4B46-A3F1-D3CAA5E3EB53}" type="slidenum">
+            <a:fld id="{384B9276-D0E1-4968-BE19-74AE89AD09E5}" type="slidenum">
               <a:rPr lang="en-US" sz="1200" b="0" u="none" strike="noStrike">
                 <a:solidFill>
                   <a:srgbClr val="000000"/>
@@ -723,7 +723,7 @@
               </a:lnSpc>
               <a:buNone/>
             </a:pPr>
-            <a:fld id="{52E96B83-CC74-4F2D-BC7D-3AFB8372E8DC}" type="slidenum">
+            <a:fld id="{C27F84E6-22D0-464F-8902-745E9752D4A3}" type="slidenum">
               <a:rPr lang="en-US" sz="1200" b="0" u="none" strike="noStrike">
                 <a:solidFill>
                   <a:srgbClr val="000000"/>
@@ -896,7 +896,7 @@
               </a:lnSpc>
               <a:buNone/>
             </a:pPr>
-            <a:fld id="{CC21EB0D-F65C-400A-AFB5-24E3898D2952}" type="slidenum">
+            <a:fld id="{9862681A-9468-465F-9400-72879D502870}" type="slidenum">
               <a:rPr lang="en-US" sz="1200" b="0" u="none" strike="noStrike">
                 <a:solidFill>
                   <a:srgbClr val="000000"/>
@@ -1069,7 +1069,7 @@
               </a:lnSpc>
               <a:buNone/>
             </a:pPr>
-            <a:fld id="{0D236983-8788-464A-8D3E-8D114B44BAC0}" type="slidenum">
+            <a:fld id="{7D377B8C-9EDC-4603-B3EC-1167DEB78CD9}" type="slidenum">
               <a:rPr lang="en-US" sz="1200" b="0" u="none" strike="noStrike">
                 <a:solidFill>
                   <a:srgbClr val="000000"/>
@@ -1242,7 +1242,7 @@
               </a:lnSpc>
               <a:buNone/>
             </a:pPr>
-            <a:fld id="{430FCEC6-72A3-4435-91DB-F54D9A218F45}" type="slidenum">
+            <a:fld id="{BDA17E83-0FEE-45F9-BFB2-8844D06B80A1}" type="slidenum">
               <a:rPr lang="en-US" sz="1200" b="0" u="none" strike="noStrike">
                 <a:solidFill>
                   <a:srgbClr val="000000"/>
@@ -1415,7 +1415,7 @@
               </a:lnSpc>
               <a:buNone/>
             </a:pPr>
-            <a:fld id="{F22E81EF-2D51-4C83-A991-571305FBAF2E}" type="slidenum">
+            <a:fld id="{222FEF2F-5BF8-4419-965E-55828C65E3B3}" type="slidenum">
               <a:rPr lang="en-US" sz="1200" b="0" u="none" strike="noStrike">
                 <a:solidFill>
                   <a:srgbClr val="000000"/>
@@ -1588,7 +1588,7 @@
               </a:lnSpc>
               <a:buNone/>
             </a:pPr>
-            <a:fld id="{6D46BC05-D313-491E-8211-303ACBD59CF6}" type="slidenum">
+            <a:fld id="{7D0361C9-54B2-4F7B-B009-F5A792A71741}" type="slidenum">
               <a:rPr lang="en-US" sz="1200" b="0" u="none" strike="noStrike">
                 <a:solidFill>
                   <a:srgbClr val="000000"/>
@@ -1761,7 +1761,7 @@
               </a:lnSpc>
               <a:buNone/>
             </a:pPr>
-            <a:fld id="{A2791D28-5F17-486D-B9B0-8DA178FF30EB}" type="slidenum">
+            <a:fld id="{B318DB5F-318E-4ACA-90E9-5EE22DBEEF69}" type="slidenum">
               <a:rPr lang="en-US" sz="1200" b="0" u="none" strike="noStrike">
                 <a:solidFill>
                   <a:srgbClr val="000000"/>
@@ -1934,7 +1934,7 @@
               </a:lnSpc>
               <a:buNone/>
             </a:pPr>
-            <a:fld id="{0A21C4BF-0C6D-4CB1-9AE7-862C34DBB794}" type="slidenum">
+            <a:fld id="{9EDF0133-BD98-4D1E-B38A-6D0F83686D75}" type="slidenum">
               <a:rPr lang="en-US" sz="1200" b="0" u="none" strike="noStrike">
                 <a:solidFill>
                   <a:srgbClr val="000000"/>
@@ -2107,7 +2107,7 @@
               </a:lnSpc>
               <a:buNone/>
             </a:pPr>
-            <a:fld id="{3D0235C5-EA2C-468F-8F1C-DE3DBFBE7FA5}" type="slidenum">
+            <a:fld id="{97D88504-2FE2-49E7-ABA4-6E01313AB4FF}" type="slidenum">
               <a:rPr lang="en-US" sz="1200" b="0" u="none" strike="noStrike">
                 <a:solidFill>
                   <a:srgbClr val="000000"/>
@@ -2280,7 +2280,7 @@
               </a:lnSpc>
               <a:buNone/>
             </a:pPr>
-            <a:fld id="{335895E0-6DCF-4480-ADA0-9FFE7FC8E364}" type="slidenum">
+            <a:fld id="{9E114E1A-55B7-4EFD-9211-13C393A8ED97}" type="slidenum">
               <a:rPr lang="en-US" sz="1200" b="0" u="none" strike="noStrike">
                 <a:solidFill>
                   <a:srgbClr val="000000"/>
@@ -2453,7 +2453,7 @@
               </a:lnSpc>
               <a:buNone/>
             </a:pPr>
-            <a:fld id="{EFF24B97-AF28-4BFA-AC1D-E727B9D1DAE3}" type="slidenum">
+            <a:fld id="{33BCAAC2-D8E3-4805-BEAB-2F261F355C5D}" type="slidenum">
               <a:rPr lang="en-US" sz="1200" b="0" u="none" strike="noStrike">
                 <a:solidFill>
                   <a:srgbClr val="000000"/>
@@ -2770,7 +2770,7 @@
               </a:lnSpc>
               <a:buNone/>
             </a:pPr>
-            <a:fld id="{552BCA31-5E87-4929-89FE-9192C5E281E3}" type="slidenum">
+            <a:fld id="{CB9FFC6D-9676-4A5F-B38B-ECDE09989DF2}" type="slidenum">
               <a:rPr lang="en-US" sz="1200" b="0" u="none" strike="noStrike">
                 <a:solidFill>
                   <a:schemeClr val="dk1">
@@ -3479,7 +3479,7 @@
               </a:lnSpc>
               <a:buNone/>
             </a:pPr>
-            <a:fld id="{5D36949A-3E57-46EF-9CBD-18954D11C705}" type="slidenum">
+            <a:fld id="{B02E13AD-3F08-4572-B799-DE8CF768FD02}" type="slidenum">
               <a:rPr lang="en-US" sz="1200" b="0" u="none" strike="noStrike">
                 <a:solidFill>
                   <a:schemeClr val="dk1">
@@ -4274,7 +4274,7 @@
               </a:lnSpc>
               <a:buNone/>
             </a:pPr>
-            <a:fld id="{DEA99058-72C5-4FB4-95F0-CBCDBE492A61}" type="slidenum">
+            <a:fld id="{81C0FB16-61BF-410F-9B19-7447C64892D1}" type="slidenum">
               <a:rPr lang="en-US" sz="1200" b="0" u="none" strike="noStrike">
                 <a:solidFill>
                   <a:schemeClr val="dk1">
@@ -4899,7 +4899,7 @@
               </a:lnSpc>
               <a:buNone/>
             </a:pPr>
-            <a:fld id="{AAA7315D-6C9F-4777-BDD2-A8000B968EE8}" type="slidenum">
+            <a:fld id="{5BF036BF-DEDD-4D2C-80E2-6D5FA01D5D86}" type="slidenum">
               <a:rPr lang="en-US" sz="1200" b="0" u="none" strike="noStrike">
                 <a:solidFill>
                   <a:schemeClr val="dk1">
@@ -5524,7 +5524,7 @@
               </a:lnSpc>
               <a:buNone/>
             </a:pPr>
-            <a:fld id="{CE029FB2-B0D1-4FE8-B36E-F83EB65A433C}" type="slidenum">
+            <a:fld id="{AF8DC322-6C04-411D-8D20-7B17101FB7B5}" type="slidenum">
               <a:rPr lang="en-US" sz="1200" b="0" u="none" strike="noStrike">
                 <a:solidFill>
                   <a:schemeClr val="dk1">
@@ -6149,7 +6149,7 @@
               </a:lnSpc>
               <a:buNone/>
             </a:pPr>
-            <a:fld id="{726A557F-2360-42A3-9E26-80C676F7EC14}" type="slidenum">
+            <a:fld id="{DE256339-4C8B-49C5-BBE0-22C0B3711E4C}" type="slidenum">
               <a:rPr lang="en-US" sz="1200" b="0" u="none" strike="noStrike">
                 <a:solidFill>
                   <a:schemeClr val="dk1">
@@ -6558,7 +6558,7 @@
               </a:lnSpc>
               <a:buNone/>
             </a:pPr>
-            <a:fld id="{BEA14EAD-E297-43A4-BA65-C077F3035A79}" type="slidenum">
+            <a:fld id="{69ABD25A-656C-44E7-89B8-4EE9DE82B3A0}" type="slidenum">
               <a:rPr lang="en-US" sz="1200" b="0" u="none" strike="noStrike">
                 <a:solidFill>
                   <a:schemeClr val="dk1">
@@ -7489,7 +7489,7 @@
               </a:lnSpc>
               <a:buNone/>
             </a:pPr>
-            <a:fld id="{44A5192C-F921-4C84-B2F5-E15220D2A4EB}" type="slidenum">
+            <a:fld id="{9CC05DDF-D07C-433A-AF4C-039389B3D93F}" type="slidenum">
               <a:rPr lang="en-US" sz="1200" b="0" u="none" strike="noStrike">
                 <a:solidFill>
                   <a:schemeClr val="dk1">
@@ -8648,7 +8648,7 @@
               </a:lnSpc>
               <a:buNone/>
             </a:pPr>
-            <a:fld id="{B96596C6-F5B9-41B4-A3D6-477C0B131D8E}" type="slidenum">
+            <a:fld id="{1F2030C3-6689-43D8-9FAC-56AF358CC259}" type="slidenum">
               <a:rPr lang="en-US" sz="1200" b="0" u="none" strike="noStrike">
                 <a:solidFill>
                   <a:schemeClr val="dk1">
@@ -8967,7 +8967,7 @@
               </a:lnSpc>
               <a:buNone/>
             </a:pPr>
-            <a:fld id="{08AABC0C-4DA2-4685-8F6C-596B56ACB6ED}" type="slidenum">
+            <a:fld id="{7DEF5ADA-83F0-4255-AC9C-53F225BE5B2F}" type="slidenum">
               <a:rPr lang="en-US" sz="1200" b="0" u="none" strike="noStrike">
                 <a:solidFill>
                   <a:schemeClr val="dk1">
@@ -9214,7 +9214,7 @@
               </a:lnSpc>
               <a:buNone/>
             </a:pPr>
-            <a:fld id="{E264F871-FEC3-4760-8F45-33C4EB5A4BA7}" type="slidenum">
+            <a:fld id="{4EDF3E58-0426-4390-9243-6E8527F13E82}" type="slidenum">
               <a:rPr lang="en-US" sz="1200" b="0" u="none" strike="noStrike">
                 <a:solidFill>
                   <a:schemeClr val="dk1">
@@ -31431,7 +31431,7 @@
         <p:spPr>
           <a:xfrm>
             <a:off x="567000" y="457200"/>
-            <a:ext cx="2852640" cy="365400"/>
+            <a:ext cx="2559960" cy="365400"/>
           </a:xfrm>
           <a:prstGeom prst="roundRect">
             <a:avLst>
@@ -31545,7 +31545,7 @@
         <p:spPr>
           <a:xfrm>
             <a:off x="1005840" y="457200"/>
-            <a:ext cx="2852640" cy="365400"/>
+            <a:ext cx="2559960" cy="365400"/>
           </a:xfrm>
           <a:prstGeom prst="rect">
             <a:avLst/>
@@ -31581,7 +31581,7 @@
                 <a:latin typeface="Arial Rounded MT Bold"/>
                 <a:ea typeface="Hiragino Sans GB"/>
               </a:rPr>
-              <a:t>② A little more</a:t>
+              <a:t>A little more</a:t>
             </a:r>
             <a:endParaRPr lang="en-US" sz="1250" b="0" u="none" strike="noStrike">
               <a:solidFill>
@@ -36822,7 +36822,7 @@
         <p:spPr>
           <a:xfrm>
             <a:off x="567000" y="457200"/>
-            <a:ext cx="4461840" cy="365400"/>
+            <a:ext cx="4169160" cy="365400"/>
           </a:xfrm>
           <a:prstGeom prst="roundRect">
             <a:avLst>
@@ -36936,7 +36936,7 @@
         <p:spPr>
           <a:xfrm>
             <a:off x="1005840" y="457200"/>
-            <a:ext cx="4461840" cy="365400"/>
+            <a:ext cx="4169160" cy="365400"/>
           </a:xfrm>
           <a:prstGeom prst="rect">
             <a:avLst/>
@@ -36972,7 +36972,7 @@
                 <a:latin typeface="Arial Rounded MT Bold"/>
                 <a:ea typeface="Hiragino Sans GB"/>
               </a:rPr>
-              <a:t>③ What it's not so good at</a:t>
+              <a:t>What it's not so good at</a:t>
             </a:r>
             <a:endParaRPr lang="en-US" sz="1250" b="0" u="none" strike="noStrike">
               <a:solidFill>

--- a/templates/decks/en/kids-ai-explainer/template.pptx
+++ b/templates/decks/en/kids-ai-explainer/template.pptx
@@ -376,7 +376,7 @@
             <a:pPr indent="0" algn="r">
               <a:buNone/>
             </a:pPr>
-            <a:fld id="{D1BB111C-DD1F-426D-8C3F-B7B0A5D13C79}" type="slidenum">
+            <a:fld id="{33CF4D61-3ACD-47A5-9FF4-A15B12138840}" type="slidenum">
               <a:rPr lang="en-US" sz="1400" b="0" u="none" strike="noStrike">
                 <a:solidFill>
                   <a:srgbClr val="000000"/>
@@ -550,7 +550,7 @@
               </a:lnSpc>
               <a:buNone/>
             </a:pPr>
-            <a:fld id="{384B9276-D0E1-4968-BE19-74AE89AD09E5}" type="slidenum">
+            <a:fld id="{67D9F54D-1A8B-4755-A818-CE6C46B213BF}" type="slidenum">
               <a:rPr lang="en-US" sz="1200" b="0" u="none" strike="noStrike">
                 <a:solidFill>
                   <a:srgbClr val="000000"/>
@@ -723,7 +723,7 @@
               </a:lnSpc>
               <a:buNone/>
             </a:pPr>
-            <a:fld id="{C27F84E6-22D0-464F-8902-745E9752D4A3}" type="slidenum">
+            <a:fld id="{73764674-E62B-4EC8-AF41-AC11D4599E4A}" type="slidenum">
               <a:rPr lang="en-US" sz="1200" b="0" u="none" strike="noStrike">
                 <a:solidFill>
                   <a:srgbClr val="000000"/>
@@ -896,7 +896,7 @@
               </a:lnSpc>
               <a:buNone/>
             </a:pPr>
-            <a:fld id="{9862681A-9468-465F-9400-72879D502870}" type="slidenum">
+            <a:fld id="{E31AC1AC-DFD8-4C70-9B0E-4FB8398E0622}" type="slidenum">
               <a:rPr lang="en-US" sz="1200" b="0" u="none" strike="noStrike">
                 <a:solidFill>
                   <a:srgbClr val="000000"/>
@@ -1069,7 +1069,7 @@
               </a:lnSpc>
               <a:buNone/>
             </a:pPr>
-            <a:fld id="{7D377B8C-9EDC-4603-B3EC-1167DEB78CD9}" type="slidenum">
+            <a:fld id="{27075071-64CE-452B-948B-5AFEF519093B}" type="slidenum">
               <a:rPr lang="en-US" sz="1200" b="0" u="none" strike="noStrike">
                 <a:solidFill>
                   <a:srgbClr val="000000"/>
@@ -1242,7 +1242,7 @@
               </a:lnSpc>
               <a:buNone/>
             </a:pPr>
-            <a:fld id="{BDA17E83-0FEE-45F9-BFB2-8844D06B80A1}" type="slidenum">
+            <a:fld id="{D8FE068A-7B25-472C-81A4-4198379E912D}" type="slidenum">
               <a:rPr lang="en-US" sz="1200" b="0" u="none" strike="noStrike">
                 <a:solidFill>
                   <a:srgbClr val="000000"/>
@@ -1415,7 +1415,7 @@
               </a:lnSpc>
               <a:buNone/>
             </a:pPr>
-            <a:fld id="{222FEF2F-5BF8-4419-965E-55828C65E3B3}" type="slidenum">
+            <a:fld id="{7AEA9307-77DA-49A4-97C4-2D094181CA0C}" type="slidenum">
               <a:rPr lang="en-US" sz="1200" b="0" u="none" strike="noStrike">
                 <a:solidFill>
                   <a:srgbClr val="000000"/>
@@ -1588,7 +1588,7 @@
               </a:lnSpc>
               <a:buNone/>
             </a:pPr>
-            <a:fld id="{7D0361C9-54B2-4F7B-B009-F5A792A71741}" type="slidenum">
+            <a:fld id="{7B77A77A-342F-4CBE-8C64-2CCD32BC42B6}" type="slidenum">
               <a:rPr lang="en-US" sz="1200" b="0" u="none" strike="noStrike">
                 <a:solidFill>
                   <a:srgbClr val="000000"/>
@@ -1761,7 +1761,7 @@
               </a:lnSpc>
               <a:buNone/>
             </a:pPr>
-            <a:fld id="{B318DB5F-318E-4ACA-90E9-5EE22DBEEF69}" type="slidenum">
+            <a:fld id="{3668425D-0C7E-435F-8BA8-8347F532997F}" type="slidenum">
               <a:rPr lang="en-US" sz="1200" b="0" u="none" strike="noStrike">
                 <a:solidFill>
                   <a:srgbClr val="000000"/>
@@ -1934,7 +1934,7 @@
               </a:lnSpc>
               <a:buNone/>
             </a:pPr>
-            <a:fld id="{9EDF0133-BD98-4D1E-B38A-6D0F83686D75}" type="slidenum">
+            <a:fld id="{DACA5ED4-8BC3-4D30-AA32-2F6AFCBF79CC}" type="slidenum">
               <a:rPr lang="en-US" sz="1200" b="0" u="none" strike="noStrike">
                 <a:solidFill>
                   <a:srgbClr val="000000"/>
@@ -2107,7 +2107,7 @@
               </a:lnSpc>
               <a:buNone/>
             </a:pPr>
-            <a:fld id="{97D88504-2FE2-49E7-ABA4-6E01313AB4FF}" type="slidenum">
+            <a:fld id="{D47DBACD-39C9-4629-8F32-A87BB2C87311}" type="slidenum">
               <a:rPr lang="en-US" sz="1200" b="0" u="none" strike="noStrike">
                 <a:solidFill>
                   <a:srgbClr val="000000"/>
@@ -2280,7 +2280,7 @@
               </a:lnSpc>
               <a:buNone/>
             </a:pPr>
-            <a:fld id="{9E114E1A-55B7-4EFD-9211-13C393A8ED97}" type="slidenum">
+            <a:fld id="{85EAD6B6-2E81-40E8-863B-734FA8A72A50}" type="slidenum">
               <a:rPr lang="en-US" sz="1200" b="0" u="none" strike="noStrike">
                 <a:solidFill>
                   <a:srgbClr val="000000"/>
@@ -2453,7 +2453,7 @@
               </a:lnSpc>
               <a:buNone/>
             </a:pPr>
-            <a:fld id="{33BCAAC2-D8E3-4805-BEAB-2F261F355C5D}" type="slidenum">
+            <a:fld id="{1A17BD58-1D9E-42A4-8AF2-DB330DE9999F}" type="slidenum">
               <a:rPr lang="en-US" sz="1200" b="0" u="none" strike="noStrike">
                 <a:solidFill>
                   <a:srgbClr val="000000"/>
@@ -2770,7 +2770,7 @@
               </a:lnSpc>
               <a:buNone/>
             </a:pPr>
-            <a:fld id="{CB9FFC6D-9676-4A5F-B38B-ECDE09989DF2}" type="slidenum">
+            <a:fld id="{91A24374-D89C-4391-9357-69521C1D8E70}" type="slidenum">
               <a:rPr lang="en-US" sz="1200" b="0" u="none" strike="noStrike">
                 <a:solidFill>
                   <a:schemeClr val="dk1">
@@ -3479,7 +3479,7 @@
               </a:lnSpc>
               <a:buNone/>
             </a:pPr>
-            <a:fld id="{B02E13AD-3F08-4572-B799-DE8CF768FD02}" type="slidenum">
+            <a:fld id="{EDF1EF86-8F2E-4672-AD58-CA1FB92F08EF}" type="slidenum">
               <a:rPr lang="en-US" sz="1200" b="0" u="none" strike="noStrike">
                 <a:solidFill>
                   <a:schemeClr val="dk1">
@@ -4274,7 +4274,7 @@
               </a:lnSpc>
               <a:buNone/>
             </a:pPr>
-            <a:fld id="{81C0FB16-61BF-410F-9B19-7447C64892D1}" type="slidenum">
+            <a:fld id="{3D3E58B1-D41F-4882-89E7-C89C3A1742B7}" type="slidenum">
               <a:rPr lang="en-US" sz="1200" b="0" u="none" strike="noStrike">
                 <a:solidFill>
                   <a:schemeClr val="dk1">
@@ -4899,7 +4899,7 @@
               </a:lnSpc>
               <a:buNone/>
             </a:pPr>
-            <a:fld id="{5BF036BF-DEDD-4D2C-80E2-6D5FA01D5D86}" type="slidenum">
+            <a:fld id="{49FC9235-8B6B-4564-BB25-8C999B947AF0}" type="slidenum">
               <a:rPr lang="en-US" sz="1200" b="0" u="none" strike="noStrike">
                 <a:solidFill>
                   <a:schemeClr val="dk1">
@@ -5524,7 +5524,7 @@
               </a:lnSpc>
               <a:buNone/>
             </a:pPr>
-            <a:fld id="{AF8DC322-6C04-411D-8D20-7B17101FB7B5}" type="slidenum">
+            <a:fld id="{0E26EFC4-383A-4773-9643-2082658E9D87}" type="slidenum">
               <a:rPr lang="en-US" sz="1200" b="0" u="none" strike="noStrike">
                 <a:solidFill>
                   <a:schemeClr val="dk1">
@@ -6149,7 +6149,7 @@
               </a:lnSpc>
               <a:buNone/>
             </a:pPr>
-            <a:fld id="{DE256339-4C8B-49C5-BBE0-22C0B3711E4C}" type="slidenum">
+            <a:fld id="{C7D88CDE-5C1B-4D0C-AFF9-280E144B9569}" type="slidenum">
               <a:rPr lang="en-US" sz="1200" b="0" u="none" strike="noStrike">
                 <a:solidFill>
                   <a:schemeClr val="dk1">
@@ -6558,7 +6558,7 @@
               </a:lnSpc>
               <a:buNone/>
             </a:pPr>
-            <a:fld id="{69ABD25A-656C-44E7-89B8-4EE9DE82B3A0}" type="slidenum">
+            <a:fld id="{777F3619-0625-4828-A577-59B4C5510AF0}" type="slidenum">
               <a:rPr lang="en-US" sz="1200" b="0" u="none" strike="noStrike">
                 <a:solidFill>
                   <a:schemeClr val="dk1">
@@ -7489,7 +7489,7 @@
               </a:lnSpc>
               <a:buNone/>
             </a:pPr>
-            <a:fld id="{9CC05DDF-D07C-433A-AF4C-039389B3D93F}" type="slidenum">
+            <a:fld id="{DF77848B-A8F7-446E-BDBC-270A60801302}" type="slidenum">
               <a:rPr lang="en-US" sz="1200" b="0" u="none" strike="noStrike">
                 <a:solidFill>
                   <a:schemeClr val="dk1">
@@ -8648,7 +8648,7 @@
               </a:lnSpc>
               <a:buNone/>
             </a:pPr>
-            <a:fld id="{1F2030C3-6689-43D8-9FAC-56AF358CC259}" type="slidenum">
+            <a:fld id="{65B1474A-D9B8-4648-9795-928BD8B83D0C}" type="slidenum">
               <a:rPr lang="en-US" sz="1200" b="0" u="none" strike="noStrike">
                 <a:solidFill>
                   <a:schemeClr val="dk1">
@@ -8967,7 +8967,7 @@
               </a:lnSpc>
               <a:buNone/>
             </a:pPr>
-            <a:fld id="{7DEF5ADA-83F0-4255-AC9C-53F225BE5B2F}" type="slidenum">
+            <a:fld id="{DCC20F4F-73FD-4224-914E-7D3F81F0BD33}" type="slidenum">
               <a:rPr lang="en-US" sz="1200" b="0" u="none" strike="noStrike">
                 <a:solidFill>
                   <a:schemeClr val="dk1">
@@ -9214,7 +9214,7 @@
               </a:lnSpc>
               <a:buNone/>
             </a:pPr>
-            <a:fld id="{4EDF3E58-0426-4390-9243-6E8527F13E82}" type="slidenum">
+            <a:fld id="{E87AA44E-A3EA-4108-BCBD-9DF8E2EE9954}" type="slidenum">
               <a:rPr lang="en-US" sz="1200" b="0" u="none" strike="noStrike">
                 <a:solidFill>
                   <a:schemeClr val="dk1">
@@ -14252,8 +14252,8 @@
         </p:nvSpPr>
         <p:spPr>
           <a:xfrm>
-            <a:off x="567000" y="1965960"/>
-            <a:ext cx="1572480" cy="2148480"/>
+            <a:off x="567000" y="1920240"/>
+            <a:ext cx="1572480" cy="2377080"/>
           </a:xfrm>
           <a:prstGeom prst="roundRect">
             <a:avLst>
@@ -14310,7 +14310,7 @@
         </p:nvSpPr>
         <p:spPr>
           <a:xfrm>
-            <a:off x="567000" y="1965960"/>
+            <a:off x="567000" y="1920240"/>
             <a:ext cx="1572480" cy="456840"/>
           </a:xfrm>
           <a:prstGeom prst="roundRect">
@@ -14368,7 +14368,7 @@
         </p:nvSpPr>
         <p:spPr>
           <a:xfrm>
-            <a:off x="567000" y="2194560"/>
+            <a:off x="567000" y="2148840"/>
             <a:ext cx="1572480" cy="228240"/>
           </a:xfrm>
           <a:prstGeom prst="roundRect">
@@ -14426,7 +14426,7 @@
         </p:nvSpPr>
         <p:spPr>
           <a:xfrm>
-            <a:off x="567000" y="1984320"/>
+            <a:off x="567000" y="1938600"/>
             <a:ext cx="1572480" cy="456840"/>
           </a:xfrm>
           <a:prstGeom prst="rect">
@@ -14484,7 +14484,7 @@
         </p:nvSpPr>
         <p:spPr>
           <a:xfrm>
-            <a:off x="960120" y="2597040"/>
+            <a:off x="960120" y="2551320"/>
             <a:ext cx="785880" cy="785880"/>
           </a:xfrm>
           <a:prstGeom prst="ellipse">
@@ -14544,7 +14544,7 @@
         </p:blipFill>
         <p:spPr>
           <a:xfrm>
-            <a:off x="1133280" y="2769840"/>
+            <a:off x="1133280" y="2724120"/>
             <a:ext cx="439920" cy="439920"/>
           </a:xfrm>
           <a:prstGeom prst="rect">
@@ -14564,7 +14564,7 @@
         </p:nvSpPr>
         <p:spPr>
           <a:xfrm>
-            <a:off x="621720" y="3429000"/>
+            <a:off x="621720" y="3383280"/>
             <a:ext cx="1462680" cy="218880"/>
           </a:xfrm>
           <a:prstGeom prst="rect">
@@ -14625,7 +14625,7 @@
         </p:nvSpPr>
         <p:spPr>
           <a:xfrm>
-            <a:off x="640080" y="3740040"/>
+            <a:off x="640080" y="3694320"/>
             <a:ext cx="1425960" cy="365400"/>
           </a:xfrm>
           <a:prstGeom prst="rect">
@@ -14686,8 +14686,8 @@
         </p:nvSpPr>
         <p:spPr>
           <a:xfrm>
-            <a:off x="2272320" y="1965960"/>
-            <a:ext cx="1572480" cy="2148480"/>
+            <a:off x="2272320" y="1920240"/>
+            <a:ext cx="1572480" cy="2377080"/>
           </a:xfrm>
           <a:prstGeom prst="roundRect">
             <a:avLst>
@@ -14744,7 +14744,7 @@
         </p:nvSpPr>
         <p:spPr>
           <a:xfrm>
-            <a:off x="2272320" y="1965960"/>
+            <a:off x="2272320" y="1920240"/>
             <a:ext cx="1572480" cy="456840"/>
           </a:xfrm>
           <a:prstGeom prst="roundRect">
@@ -14802,7 +14802,7 @@
         </p:nvSpPr>
         <p:spPr>
           <a:xfrm>
-            <a:off x="2272320" y="2194560"/>
+            <a:off x="2272320" y="2148840"/>
             <a:ext cx="1572480" cy="228240"/>
           </a:xfrm>
           <a:prstGeom prst="roundRect">
@@ -14860,7 +14860,7 @@
         </p:nvSpPr>
         <p:spPr>
           <a:xfrm>
-            <a:off x="2272320" y="1984320"/>
+            <a:off x="2272320" y="1938600"/>
             <a:ext cx="1572480" cy="456840"/>
           </a:xfrm>
           <a:prstGeom prst="rect">
@@ -14918,7 +14918,7 @@
         </p:nvSpPr>
         <p:spPr>
           <a:xfrm>
-            <a:off x="2665440" y="2597040"/>
+            <a:off x="2665440" y="2551320"/>
             <a:ext cx="785880" cy="785880"/>
           </a:xfrm>
           <a:prstGeom prst="ellipse">
@@ -14978,7 +14978,7 @@
         </p:blipFill>
         <p:spPr>
           <a:xfrm>
-            <a:off x="2838600" y="2769840"/>
+            <a:off x="2838600" y="2724120"/>
             <a:ext cx="439920" cy="439920"/>
           </a:xfrm>
           <a:prstGeom prst="rect">
@@ -14998,7 +14998,7 @@
         </p:nvSpPr>
         <p:spPr>
           <a:xfrm>
-            <a:off x="2327040" y="3429000"/>
+            <a:off x="2327040" y="3383280"/>
             <a:ext cx="1462680" cy="218880"/>
           </a:xfrm>
           <a:prstGeom prst="rect">
@@ -15059,7 +15059,7 @@
         </p:nvSpPr>
         <p:spPr>
           <a:xfrm>
-            <a:off x="2345400" y="3740040"/>
+            <a:off x="2345400" y="3694320"/>
             <a:ext cx="1425960" cy="365400"/>
           </a:xfrm>
           <a:prstGeom prst="rect">
@@ -15120,8 +15120,8 @@
         </p:nvSpPr>
         <p:spPr>
           <a:xfrm>
-            <a:off x="3977640" y="1965960"/>
-            <a:ext cx="1572480" cy="2148480"/>
+            <a:off x="3977640" y="1920240"/>
+            <a:ext cx="1572480" cy="2377080"/>
           </a:xfrm>
           <a:prstGeom prst="roundRect">
             <a:avLst>
@@ -15178,7 +15178,7 @@
         </p:nvSpPr>
         <p:spPr>
           <a:xfrm>
-            <a:off x="3977640" y="1965960"/>
+            <a:off x="3977640" y="1920240"/>
             <a:ext cx="1572480" cy="456840"/>
           </a:xfrm>
           <a:prstGeom prst="roundRect">
@@ -15236,7 +15236,7 @@
         </p:nvSpPr>
         <p:spPr>
           <a:xfrm>
-            <a:off x="3977640" y="2194560"/>
+            <a:off x="3977640" y="2148840"/>
             <a:ext cx="1572480" cy="228240"/>
           </a:xfrm>
           <a:prstGeom prst="roundRect">
@@ -15294,7 +15294,7 @@
         </p:nvSpPr>
         <p:spPr>
           <a:xfrm>
-            <a:off x="3977640" y="1984320"/>
+            <a:off x="3977640" y="1938600"/>
             <a:ext cx="1572480" cy="456840"/>
           </a:xfrm>
           <a:prstGeom prst="rect">
@@ -15352,7 +15352,7 @@
         </p:nvSpPr>
         <p:spPr>
           <a:xfrm>
-            <a:off x="4370760" y="2597040"/>
+            <a:off x="4370760" y="2551320"/>
             <a:ext cx="785880" cy="785880"/>
           </a:xfrm>
           <a:prstGeom prst="ellipse">
@@ -15412,7 +15412,7 @@
         </p:blipFill>
         <p:spPr>
           <a:xfrm>
-            <a:off x="4543920" y="2769840"/>
+            <a:off x="4543920" y="2724120"/>
             <a:ext cx="439920" cy="439920"/>
           </a:xfrm>
           <a:prstGeom prst="rect">
@@ -15432,7 +15432,7 @@
         </p:nvSpPr>
         <p:spPr>
           <a:xfrm>
-            <a:off x="4032360" y="3429000"/>
+            <a:off x="4032360" y="3383280"/>
             <a:ext cx="1462680" cy="218880"/>
           </a:xfrm>
           <a:prstGeom prst="rect">
@@ -15493,7 +15493,7 @@
         </p:nvSpPr>
         <p:spPr>
           <a:xfrm>
-            <a:off x="4050720" y="3740040"/>
+            <a:off x="4050720" y="3694320"/>
             <a:ext cx="1425960" cy="365400"/>
           </a:xfrm>
           <a:prstGeom prst="rect">
@@ -15554,8 +15554,8 @@
         </p:nvSpPr>
         <p:spPr>
           <a:xfrm>
-            <a:off x="5682960" y="1965960"/>
-            <a:ext cx="1572480" cy="2148480"/>
+            <a:off x="5682960" y="1920240"/>
+            <a:ext cx="1572480" cy="2377080"/>
           </a:xfrm>
           <a:prstGeom prst="roundRect">
             <a:avLst>
@@ -15612,7 +15612,7 @@
         </p:nvSpPr>
         <p:spPr>
           <a:xfrm>
-            <a:off x="5682960" y="1965960"/>
+            <a:off x="5682960" y="1920240"/>
             <a:ext cx="1572480" cy="456840"/>
           </a:xfrm>
           <a:prstGeom prst="roundRect">
@@ -15670,7 +15670,7 @@
         </p:nvSpPr>
         <p:spPr>
           <a:xfrm>
-            <a:off x="5682960" y="2194560"/>
+            <a:off x="5682960" y="2148840"/>
             <a:ext cx="1572480" cy="228240"/>
           </a:xfrm>
           <a:prstGeom prst="roundRect">
@@ -15728,7 +15728,7 @@
         </p:nvSpPr>
         <p:spPr>
           <a:xfrm>
-            <a:off x="5682960" y="1984320"/>
+            <a:off x="5682960" y="1938600"/>
             <a:ext cx="1572480" cy="456840"/>
           </a:xfrm>
           <a:prstGeom prst="rect">
@@ -15786,7 +15786,7 @@
         </p:nvSpPr>
         <p:spPr>
           <a:xfrm>
-            <a:off x="6076080" y="2597040"/>
+            <a:off x="6076080" y="2551320"/>
             <a:ext cx="785880" cy="785880"/>
           </a:xfrm>
           <a:prstGeom prst="ellipse">
@@ -15846,7 +15846,7 @@
         </p:blipFill>
         <p:spPr>
           <a:xfrm>
-            <a:off x="6249240" y="2769840"/>
+            <a:off x="6249240" y="2724120"/>
             <a:ext cx="439920" cy="439920"/>
           </a:xfrm>
           <a:prstGeom prst="rect">
@@ -15866,7 +15866,7 @@
         </p:nvSpPr>
         <p:spPr>
           <a:xfrm>
-            <a:off x="5737680" y="3429000"/>
+            <a:off x="5737680" y="3383280"/>
             <a:ext cx="1462680" cy="218880"/>
           </a:xfrm>
           <a:prstGeom prst="rect">
@@ -15927,7 +15927,7 @@
         </p:nvSpPr>
         <p:spPr>
           <a:xfrm>
-            <a:off x="5756040" y="3740040"/>
+            <a:off x="5756040" y="3694320"/>
             <a:ext cx="1425960" cy="365400"/>
           </a:xfrm>
           <a:prstGeom prst="rect">
@@ -15988,8 +15988,8 @@
         </p:nvSpPr>
         <p:spPr>
           <a:xfrm>
-            <a:off x="7388280" y="1965960"/>
-            <a:ext cx="1572480" cy="2148480"/>
+            <a:off x="7388280" y="1920240"/>
+            <a:ext cx="1572480" cy="2377080"/>
           </a:xfrm>
           <a:prstGeom prst="roundRect">
             <a:avLst>
@@ -16046,7 +16046,7 @@
         </p:nvSpPr>
         <p:spPr>
           <a:xfrm>
-            <a:off x="7388280" y="1965960"/>
+            <a:off x="7388280" y="1920240"/>
             <a:ext cx="1572480" cy="456840"/>
           </a:xfrm>
           <a:prstGeom prst="roundRect">
@@ -16104,7 +16104,7 @@
         </p:nvSpPr>
         <p:spPr>
           <a:xfrm>
-            <a:off x="7388280" y="2194560"/>
+            <a:off x="7388280" y="2148840"/>
             <a:ext cx="1572480" cy="228240"/>
           </a:xfrm>
           <a:prstGeom prst="roundRect">
@@ -16162,7 +16162,7 @@
         </p:nvSpPr>
         <p:spPr>
           <a:xfrm>
-            <a:off x="7388280" y="1984320"/>
+            <a:off x="7388280" y="1938600"/>
             <a:ext cx="1572480" cy="456840"/>
           </a:xfrm>
           <a:prstGeom prst="rect">
@@ -16220,7 +16220,7 @@
         </p:nvSpPr>
         <p:spPr>
           <a:xfrm>
-            <a:off x="7781400" y="2597040"/>
+            <a:off x="7781400" y="2551320"/>
             <a:ext cx="785880" cy="785880"/>
           </a:xfrm>
           <a:prstGeom prst="ellipse">
@@ -16280,7 +16280,7 @@
         </p:blipFill>
         <p:spPr>
           <a:xfrm>
-            <a:off x="7954560" y="2769840"/>
+            <a:off x="7954560" y="2724120"/>
             <a:ext cx="439920" cy="439920"/>
           </a:xfrm>
           <a:prstGeom prst="rect">
@@ -16300,7 +16300,7 @@
         </p:nvSpPr>
         <p:spPr>
           <a:xfrm>
-            <a:off x="7443360" y="3429000"/>
+            <a:off x="7443360" y="3383280"/>
             <a:ext cx="1462680" cy="218880"/>
           </a:xfrm>
           <a:prstGeom prst="rect">
@@ -16361,7 +16361,7 @@
         </p:nvSpPr>
         <p:spPr>
           <a:xfrm>
-            <a:off x="7461360" y="3740040"/>
+            <a:off x="7461360" y="3694320"/>
             <a:ext cx="1425960" cy="365400"/>
           </a:xfrm>
           <a:prstGeom prst="rect">
